--- a/week-02/presentations/ppts/day-02-north-star-metric.pptx
+++ b/week-02/presentations/ppts/day-02-north-star-metric.pptx
@@ -7522,7 +7522,16 @@
             </a:pPr>
             <a:r>
               <a:rPr/>
-              <a:t>The trap: A real NS smells like a KPI to the inexperienced PM. A vanity metric also smells like a KPI. The difference is whether you can name the customer outcome behind it.</a:t>
+              <a:t>Annual recurring revenue (ARR), the classic “vanity dressed up” example, moves without customers feeling it.</a:t>
+            </a:r>
+          </a:p>
+          <a:p>
+            <a:pPr lvl="0" indent="0" marL="0">
+              <a:buNone/>
+            </a:pPr>
+            <a:r>
+              <a:rPr/>
+              <a:t>The trap: A real NS smells like a key performance indicator (KPI) to the inexperienced PM. A vanity metric also smells like a KPI. The difference is whether you can name the customer outcome behind it.</a:t>
             </a:r>
           </a:p>
         </p:txBody>

--- a/week-02/presentations/ppts/day-02-north-star-metric.pptx
+++ b/week-02/presentations/ppts/day-02-north-star-metric.pptx
@@ -5366,6 +5366,19 @@
             <a:r>
               <a:rPr/>
               <a:t>Three blanks, no exceptions:</a:t>
+            </a:r>
+          </a:p>
+          <a:p>
+            <a:pPr lvl="0" indent="0">
+              <a:buNone/>
+            </a:pPr>
+            <a:r>
+              <a:rPr>
+                <a:latin typeface="Courier"/>
+              </a:rPr>
+              <a:t>We are winning when [customer outcome]
+increases for [user segment],
+measured by [single number].</a:t>
             </a:r>
           </a:p>
           <a:p>

--- a/week-02/presentations/ppts/day-02-north-star-metric.pptx
+++ b/week-02/presentations/ppts/day-02-north-star-metric.pptx
@@ -627,7 +627,7 @@
             </a:pPr>
             <a:r>
               <a:rPr/>
-              <a:t>Read it slowly. Each blank failing is a different bug. Triads should call out each blank as they fill it.</a:t>
+              <a:t>Read it slowly. Each blank failing is a different bug. Quads should call out each blank as they fill it.</a:t>
             </a:r>
           </a:p>
         </p:txBody>
@@ -791,7 +791,7 @@
             </a:pPr>
             <a:r>
               <a:rPr/>
-              <a:t>Push back on triads who agree too quickly. Disagreement here is healthy and produces sharper NSs.</a:t>
+              <a:t>Push back on quads who agree too quickly. Disagreement here is healthy and produces sharper NSs.</a:t>
             </a:r>
           </a:p>
         </p:txBody>
@@ -1037,7 +1037,7 @@
             </a:pPr>
             <a:r>
               <a:rPr/>
-              <a:t>The walk-down/walk-up is fast — 5 minutes. Triads who skip it ship incoherent Tier Sheets.</a:t>
+              <a:t>The walk-down/walk-up is fast — 5 minutes. Quads who skip it ship incoherent Tier Sheets.</a:t>
             </a:r>
           </a:p>
         </p:txBody>
@@ -1119,7 +1119,7 @@
             </a:pPr>
             <a:r>
               <a:rPr/>
-              <a:t>The CEO-then-dispatcher cadence forces triads to hold both audiences at once. Don’t let them skip a role.</a:t>
+              <a:t>The CEO-then-dispatcher cadence forces quads to hold both audiences at once. Don’t let them skip a role.</a:t>
             </a:r>
           </a:p>
         </p:txBody>
@@ -1201,7 +1201,7 @@
             </a:pPr>
             <a:r>
               <a:rPr/>
-              <a:t>Final block: walk the NS up and down the Tier Sheet for coherence, then lock. Don’t let triads lock without the walk.</a:t>
+              <a:t>Final block: walk the NS up and down the Tier Sheet for coherence, then lock. Don’t let quads lock without the walk.</a:t>
             </a:r>
           </a:p>
         </p:txBody>
@@ -1283,7 +1283,7 @@
             </a:pPr>
             <a:r>
               <a:rPr/>
-              <a:t>If a triad is missing more than two boxes, they’re not done. Push back.</a:t>
+              <a:t>If a quad is missing more than two boxes, they’re not done. Push back.</a:t>
             </a:r>
           </a:p>
         </p:txBody>
@@ -1365,7 +1365,7 @@
             </a:pPr>
             <a:r>
               <a:rPr/>
-              <a:t>Pin both artifacts on the wall when triads finish. They’ll be referenced every day for the rest of the week.</a:t>
+              <a:t>Pin both artifacts on the wall when quads finish. They’ll be referenced every day for the rest of the week.</a:t>
             </a:r>
           </a:p>
         </p:txBody>
@@ -1611,7 +1611,7 @@
             </a:pPr>
             <a:r>
               <a:rPr/>
-              <a:t>Closing reflection. If the answer is fuzzy, the NS is fuzzy. Use it as the diagnostic for which triads to coach Monday.</a:t>
+              <a:t>Closing reflection. If the answer is fuzzy, the NS is fuzzy. Use it as the diagnostic for which quads to coach Monday.</a:t>
             </a:r>
           </a:p>
         </p:txBody>
@@ -1693,7 +1693,7 @@
             </a:pPr>
             <a:r>
               <a:rPr/>
-              <a:t>The arc is recognize → draft → defend → lock. Don’t let triads lock too early.</a:t>
+              <a:t>The arc is recognize → draft → defend → lock. Don’t let quads lock too early.</a:t>
             </a:r>
           </a:p>
         </p:txBody>
@@ -1775,7 +1775,7 @@
             </a:pPr>
             <a:r>
               <a:rPr/>
-              <a:t>Today’s vocabulary work is sharper than Day 1’s. The three pitfalls are the toolkit triads will run against their own NS later.</a:t>
+              <a:t>Today’s vocabulary work is sharper than Day 1’s. The three pitfalls are the toolkit quads will run against their own NS later.</a:t>
             </a:r>
           </a:p>
         </p:txBody>
@@ -2193,7 +2193,7 @@
             </a:pPr>
             <a:r>
               <a:rPr/>
-              <a:t>Take yesterday’s placeholder and turn it into something a triad would put their name on. The counter-metric concept is the new tool today.</a:t>
+              <a:t>Take yesterday’s placeholder and turn it into something a quad would put their name on. The counter-metric concept is the new tool today.</a:t>
             </a:r>
           </a:p>
         </p:txBody>
@@ -5651,16 +5651,16 @@
             </a:pPr>
             <a:r>
               <a:rPr b="1"/>
-              <a:t>Triads • 40 minutes</a:t>
-            </a:r>
-          </a:p>
-          <a:p>
-            <a:pPr lvl="0" indent="0" marL="0">
-              <a:buNone/>
-            </a:pPr>
-            <a:r>
-              <a:rPr/>
-              <a:t>Each triad member proposes one NS candidate. Pitfall-test all three. Converge on one. Add a counter-metric.</a:t>
+              <a:t>Quads • 40 minutes</a:t>
+            </a:r>
+          </a:p>
+          <a:p>
+            <a:pPr lvl="0" indent="0" marL="0">
+              <a:buNone/>
+            </a:pPr>
+            <a:r>
+              <a:rPr/>
+              <a:t>Each quad member proposes one NS candidate. Pitfall-test all three. Converge on one. Add a counter-metric.</a:t>
             </a:r>
           </a:p>
           <a:p>
@@ -6116,16 +6116,16 @@
             </a:pPr>
             <a:r>
               <a:rPr b="1"/>
-              <a:t>Triad pairs • 40 minutes</a:t>
-            </a:r>
-          </a:p>
-          <a:p>
-            <a:pPr lvl="0" indent="0" marL="0">
-              <a:buNone/>
-            </a:pPr>
-            <a:r>
-              <a:rPr/>
-              <a:t>Pair with another triad. Take turns being defender and challenger. Challenger plays CEO for 4 min, then dispatcher for 4 min.</a:t>
+              <a:t>Quad pairs • 40 minutes</a:t>
+            </a:r>
+          </a:p>
+          <a:p>
+            <a:pPr lvl="0" indent="0" marL="0">
+              <a:buNone/>
+            </a:pPr>
+            <a:r>
+              <a:rPr/>
+              <a:t>Pair with another quad. Take turns being defender and challenger. Challenger plays CEO for 4 min, then dispatcher for 4 min.</a:t>
             </a:r>
           </a:p>
           <a:p>
@@ -6512,16 +6512,16 @@
             </a:pPr>
             <a:r>
               <a:rPr b="1"/>
-              <a:t>Triads • 45 minutes • Readouts</a:t>
-            </a:r>
-          </a:p>
-          <a:p>
-            <a:pPr lvl="0" indent="0" marL="0">
-              <a:buNone/>
-            </a:pPr>
-            <a:r>
-              <a:rPr/>
-              <a:t>Final NS lock-in, walk-down/walk-up of the Tier Sheet, and a 90-second readout per triad.</a:t>
+              <a:t>Quads • 45 minutes • Readouts</a:t>
+            </a:r>
+          </a:p>
+          <a:p>
+            <a:pPr lvl="0" indent="0" marL="0">
+              <a:buNone/>
+            </a:pPr>
+            <a:r>
+              <a:rPr/>
+              <a:t>Final NS lock-in, walk-down/walk-up of the Tier Sheet, and a 90-second readout per quad.</a:t>
             </a:r>
           </a:p>
           <a:p>
@@ -7817,16 +7817,16 @@
             </a:pPr>
             <a:r>
               <a:rPr b="1"/>
-              <a:t>Triads • 35 minutes</a:t>
-            </a:r>
-          </a:p>
-          <a:p>
-            <a:pPr lvl="0" indent="0" marL="0">
-              <a:buNone/>
-            </a:pPr>
-            <a:r>
-              <a:rPr/>
-              <a:t>Your triad receives 8 NS candidates from public companies (anonymized). For each: assign 0–3 pitfalls present, with a one-line argument.</a:t>
+              <a:t>Quads • 35 minutes</a:t>
+            </a:r>
+          </a:p>
+          <a:p>
+            <a:pPr lvl="0" indent="0" marL="0">
+              <a:buNone/>
+            </a:pPr>
+            <a:r>
+              <a:rPr/>
+              <a:t>Your quad receives 8 NS candidates from public companies (anonymized). For each: assign 0–3 pitfalls present, with a one-line argument.</a:t>
             </a:r>
           </a:p>
           <a:p>

--- a/week-02/presentations/ppts/day-02-north-star-metric.pptx
+++ b/week-02/presentations/ppts/day-02-north-star-metric.pptx
@@ -5651,7 +5651,7 @@
             </a:pPr>
             <a:r>
               <a:rPr b="1"/>
-              <a:t>Quads • 40 minutes</a:t>
+              <a:t>Quads • 50 minutes</a:t>
             </a:r>
           </a:p>
           <a:p>
@@ -6116,7 +6116,7 @@
             </a:pPr>
             <a:r>
               <a:rPr b="1"/>
-              <a:t>Quad pairs • 40 minutes</a:t>
+              <a:t>Quad pairs • 50 minutes</a:t>
             </a:r>
           </a:p>
           <a:p>
@@ -6512,7 +6512,7 @@
             </a:pPr>
             <a:r>
               <a:rPr b="1"/>
-              <a:t>Quads • 45 minutes • Readouts</a:t>
+              <a:t>Quads • 55 minutes • Readouts</a:t>
             </a:r>
           </a:p>
           <a:p>
@@ -7817,7 +7817,7 @@
             </a:pPr>
             <a:r>
               <a:rPr b="1"/>
-              <a:t>Quads • 35 minutes</a:t>
+              <a:t>Quads • 45 minutes</a:t>
             </a:r>
           </a:p>
           <a:p>

--- a/week-02/presentations/ppts/day-02-north-star-metric.pptx
+++ b/week-02/presentations/ppts/day-02-north-star-metric.pptx
@@ -5669,7 +5669,7 @@
             </a:pPr>
             <a:r>
               <a:rPr/>
-              <a:t>15 min: each member drafts a candidate</a:t>
+              <a:t>25 min: each member drafts a candidate</a:t>
             </a:r>
           </a:p>
           <a:p>
@@ -6161,7 +6161,7 @@
             </a:pPr>
             <a:r>
               <a:rPr/>
-              <a:t>⏱ 16 min round 1 · 16 min round 2 · 8 min capture</a:t>
+              <a:t>⏱ 20 min round 1 · 20 min round 2 · 10 min capture</a:t>
             </a:r>
           </a:p>
         </p:txBody>
@@ -6539,7 +6539,7 @@
             </a:pPr>
             <a:r>
               <a:rPr/>
-              <a:t>20 min: walk-down (signals) and walk-up (KPIs &amp; business outcome)</a:t>
+              <a:t>30 min: walk-down (signals) and walk-up (KPIs &amp; business outcome)</a:t>
             </a:r>
           </a:p>
           <a:p>
@@ -7862,7 +7862,7 @@
             </a:pPr>
             <a:r>
               <a:rPr/>
-              <a:t>⏱ 15 min triage · 10 min argue · 10 min readout prep</a:t>
+              <a:t>⏱ 25 min triage · 10 min argue · 10 min readout prep</a:t>
             </a:r>
           </a:p>
         </p:txBody>
